--- a/data/09_internal_training/training_7.pptx
+++ b/data/09_internal_training/training_7.pptx
@@ -3140,56 +3140,61 @@
           <a:p/>
           <a:p>
             <a:r>
-              <a:t>华辰资本旗下的 HC Alpha Growth Fund 在最近的资产配置会议中</a:t>
-            </a:r>
-          </a:p>
-          <a:p>
-            <a:r>
-              <a:t>讨论了 云计算 行业的投资机会，并对 浦华众城信息有限公司</a:t>
+              <a:t>信诚致远科技有限公司 是中国 云计算 行业的重要企业之一。</a:t>
+            </a:r>
+          </a:p>
+          <a:p>
+            <a:r>
+              <a:t>根据华辰资本 量化研究部 的研究，该公司成立于 2014 年，</a:t>
+            </a:r>
+          </a:p>
+          <a:p>
+            <a:r>
+              <a:t>目前员工规模约 1360 人。公司近年来持续加大研发投入，</a:t>
+            </a:r>
+          </a:p>
+          <a:p>
+            <a:r>
+              <a:t>在核心技术方面形成了较强的竞争壁垒。</a:t>
+            </a:r>
+          </a:p>
+          <a:p/>
+          <a:p/>
+          <a:p>
+            <a:r>
+              <a:t>佳禾传媒有限公司 是中国 云计算 行业的重要企业之一。</a:t>
+            </a:r>
+          </a:p>
+          <a:p>
+            <a:r>
+              <a:t>根据华辰资本 投资策略部 的研究，该公司成立于 2016 年，</a:t>
+            </a:r>
+          </a:p>
+          <a:p>
+            <a:r>
+              <a:t>目前员工规模约 3802 人。公司近年来持续加大研发投入，</a:t>
+            </a:r>
+          </a:p>
+          <a:p>
+            <a:r>
+              <a:t>在核心技术方面形成了较强的竞争壁垒。</a:t>
+            </a:r>
+          </a:p>
+          <a:p/>
+          <a:p/>
+          <a:p>
+            <a:r>
+              <a:t>华辰资本旗下的 HC Quant Arbitrage Fund 在最近的资产配置会议中</a:t>
+            </a:r>
+          </a:p>
+          <a:p>
+            <a:r>
+              <a:t>讨论了 机器人 行业的投资机会，并对 毕博诚信息有限公司</a:t>
             </a:r>
           </a:p>
           <a:p>
             <a:r>
               <a:t>进行了重点评估。</a:t>
-            </a:r>
-          </a:p>
-          <a:p/>
-          <a:p/>
-          <a:p>
-            <a:r>
-              <a:t>华辰资本旗下的 HC Global Macro Fund 在最近的资产配置会议中</a:t>
-            </a:r>
-          </a:p>
-          <a:p>
-            <a:r>
-              <a:t>讨论了 云计算 行业的投资机会，并对 天益信息有限公司</a:t>
-            </a:r>
-          </a:p>
-          <a:p>
-            <a:r>
-              <a:t>进行了重点评估。</a:t>
-            </a:r>
-          </a:p>
-          <a:p/>
-          <a:p/>
-          <a:p>
-            <a:r>
-              <a:t>鸿睿思博信息有限公司 是中国 半导体 行业的重要企业之一。</a:t>
-            </a:r>
-          </a:p>
-          <a:p>
-            <a:r>
-              <a:t>根据华辰资本 投资委员会 的研究，该公司成立于 2015 年，</a:t>
-            </a:r>
-          </a:p>
-          <a:p>
-            <a:r>
-              <a:t>目前员工规模约 1207 人。公司近年来持续加大研发投入，</a:t>
-            </a:r>
-          </a:p>
-          <a:p>
-            <a:r>
-              <a:t>在核心技术方面形成了较强的竞争壁垒。</a:t>
             </a:r>
           </a:p>
           <a:p/>
@@ -3251,56 +3256,51 @@
           <a:p/>
           <a:p>
             <a:r>
-              <a:t>快讯网络有限公司 是中国 新能源 行业的重要企业之一。</a:t>
-            </a:r>
-          </a:p>
-          <a:p>
-            <a:r>
-              <a:t>根据华辰资本 风险管理部 的研究，该公司成立于 2016 年，</a:t>
-            </a:r>
-          </a:p>
-          <a:p>
-            <a:r>
-              <a:t>目前员工规模约 3433 人。公司近年来持续加大研发投入，</a:t>
-            </a:r>
-          </a:p>
-          <a:p>
-            <a:r>
-              <a:t>在核心技术方面形成了较强的竞争壁垒。</a:t>
-            </a:r>
-          </a:p>
-          <a:p/>
-          <a:p/>
-          <a:p>
-            <a:r>
-              <a:t>根据内部财务模型测算，天益科技有限公司 在未来三年</a:t>
-            </a:r>
-          </a:p>
-          <a:p>
-            <a:r>
-              <a:t>收入复合增长率预计可达到 13% 左右。</a:t>
-            </a:r>
-          </a:p>
-          <a:p>
-            <a:r>
-              <a:t>该预测基于行业需求增长以及公司产能扩张计划。</a:t>
-            </a:r>
-          </a:p>
-          <a:p/>
-          <a:p/>
-          <a:p>
-            <a:r>
-              <a:t>华辰资本旗下的 HC Global Macro Fund 在最近的资产配置会议中</a:t>
-            </a:r>
-          </a:p>
-          <a:p>
-            <a:r>
-              <a:t>讨论了 医疗科技 行业的投资机会，并对 富罳信息有限公司</a:t>
-            </a:r>
-          </a:p>
-          <a:p>
-            <a:r>
-              <a:t>进行了重点评估。</a:t>
+              <a:t>风险管理部认为，新能源 行业仍然面临若干</a:t>
+            </a:r>
+          </a:p>
+          <a:p>
+            <a:r>
+              <a:t>不确定性因素，包括技术迭代风险、政策变化、</a:t>
+            </a:r>
+          </a:p>
+          <a:p>
+            <a:r>
+              <a:t>以及市场竞争加剧等问题。</a:t>
+            </a:r>
+          </a:p>
+          <a:p/>
+          <a:p/>
+          <a:p>
+            <a:r>
+              <a:t>从产业链角度看，半导体 行业主要由上游设备厂商、</a:t>
+            </a:r>
+          </a:p>
+          <a:p>
+            <a:r>
+              <a:t>中游平台企业以及下游应用厂商组成。</a:t>
+            </a:r>
+          </a:p>
+          <a:p>
+            <a:r>
+              <a:t>联软网络有限公司 主要位于产业链的 上游 环节。</a:t>
+            </a:r>
+          </a:p>
+          <a:p/>
+          <a:p/>
+          <a:p>
+            <a:r>
+              <a:t>风险管理部认为，新能源 行业仍然面临若干</a:t>
+            </a:r>
+          </a:p>
+          <a:p>
+            <a:r>
+              <a:t>不确定性因素，包括技术迭代风险、政策变化、</a:t>
+            </a:r>
+          </a:p>
+          <a:p>
+            <a:r>
+              <a:t>以及市场竞争加剧等问题。</a:t>
             </a:r>
           </a:p>
           <a:p/>
@@ -3362,56 +3362,51 @@
           <a:p/>
           <a:p>
             <a:r>
-              <a:t>银嘉信息有限公司 是中国 消费科技 行业的重要企业之一。</a:t>
-            </a:r>
-          </a:p>
-          <a:p>
-            <a:r>
-              <a:t>根据华辰资本 风险管理部 的研究，该公司成立于 2020 年，</a:t>
-            </a:r>
-          </a:p>
-          <a:p>
-            <a:r>
-              <a:t>目前员工规模约 2026 人。公司近年来持续加大研发投入，</a:t>
-            </a:r>
-          </a:p>
-          <a:p>
-            <a:r>
-              <a:t>在核心技术方面形成了较强的竞争壁垒。</a:t>
-            </a:r>
-          </a:p>
-          <a:p/>
-          <a:p/>
-          <a:p>
-            <a:r>
-              <a:t>风险管理部认为，云计算 行业仍然面临若干</a:t>
-            </a:r>
-          </a:p>
-          <a:p>
-            <a:r>
-              <a:t>不确定性因素，包括技术迭代风险、政策变化、</a:t>
-            </a:r>
-          </a:p>
-          <a:p>
-            <a:r>
-              <a:t>以及市场竞争加剧等问题。</a:t>
-            </a:r>
-          </a:p>
-          <a:p/>
-          <a:p/>
-          <a:p>
-            <a:r>
-              <a:t>风险管理部认为，新能源 行业仍然面临若干</a:t>
-            </a:r>
-          </a:p>
-          <a:p>
-            <a:r>
-              <a:t>不确定性因素，包括技术迭代风险、政策变化、</a:t>
-            </a:r>
-          </a:p>
-          <a:p>
-            <a:r>
-              <a:t>以及市场竞争加剧等问题。</a:t>
+              <a:t>从产业链角度看，新能源 行业主要由上游设备厂商、</a:t>
+            </a:r>
+          </a:p>
+          <a:p>
+            <a:r>
+              <a:t>中游平台企业以及下游应用厂商组成。</a:t>
+            </a:r>
+          </a:p>
+          <a:p>
+            <a:r>
+              <a:t>浦华众城网络有限公司 主要位于产业链的 中游 环节。</a:t>
+            </a:r>
+          </a:p>
+          <a:p/>
+          <a:p/>
+          <a:p>
+            <a:r>
+              <a:t>根据内部财务模型测算，信诚致远科技有限公司 在未来三年</a:t>
+            </a:r>
+          </a:p>
+          <a:p>
+            <a:r>
+              <a:t>收入复合增长率预计可达到 27% 左右。</a:t>
+            </a:r>
+          </a:p>
+          <a:p>
+            <a:r>
+              <a:t>该预测基于行业需求增长以及公司产能扩张计划。</a:t>
+            </a:r>
+          </a:p>
+          <a:p/>
+          <a:p/>
+          <a:p>
+            <a:r>
+              <a:t>从产业链角度看，新能源 行业主要由上游设备厂商、</a:t>
+            </a:r>
+          </a:p>
+          <a:p>
+            <a:r>
+              <a:t>中游平台企业以及下游应用厂商组成。</a:t>
+            </a:r>
+          </a:p>
+          <a:p>
+            <a:r>
+              <a:t>创汇传媒有限公司 主要位于产业链的 下游 环节。</a:t>
             </a:r>
           </a:p>
           <a:p/>
@@ -3473,51 +3468,51 @@
           <a:p/>
           <a:p>
             <a:r>
-              <a:t>根据内部财务模型测算，凌云网络有限公司 在未来三年</a:t>
-            </a:r>
-          </a:p>
-          <a:p>
-            <a:r>
-              <a:t>收入复合增长率预计可达到 12% 左右。</a:t>
+              <a:t>从产业链角度看，云计算 行业主要由上游设备厂商、</a:t>
+            </a:r>
+          </a:p>
+          <a:p>
+            <a:r>
+              <a:t>中游平台企业以及下游应用厂商组成。</a:t>
+            </a:r>
+          </a:p>
+          <a:p>
+            <a:r>
+              <a:t>佳禾传媒有限公司 主要位于产业链的 中游 环节。</a:t>
+            </a:r>
+          </a:p>
+          <a:p/>
+          <a:p/>
+          <a:p>
+            <a:r>
+              <a:t>风险管理部认为，云计算 行业仍然面临若干</a:t>
+            </a:r>
+          </a:p>
+          <a:p>
+            <a:r>
+              <a:t>不确定性因素，包括技术迭代风险、政策变化、</a:t>
+            </a:r>
+          </a:p>
+          <a:p>
+            <a:r>
+              <a:t>以及市场竞争加剧等问题。</a:t>
+            </a:r>
+          </a:p>
+          <a:p/>
+          <a:p/>
+          <a:p>
+            <a:r>
+              <a:t>根据内部财务模型测算，迪摩信息有限公司 在未来三年</a:t>
+            </a:r>
+          </a:p>
+          <a:p>
+            <a:r>
+              <a:t>收入复合增长率预计可达到 10% 左右。</a:t>
             </a:r>
           </a:p>
           <a:p>
             <a:r>
               <a:t>该预测基于行业需求增长以及公司产能扩张计划。</a:t>
-            </a:r>
-          </a:p>
-          <a:p/>
-          <a:p/>
-          <a:p>
-            <a:r>
-              <a:t>华辰资本旗下的 HC Global Macro Fund 在最近的资产配置会议中</a:t>
-            </a:r>
-          </a:p>
-          <a:p>
-            <a:r>
-              <a:t>讨论了 半导体 行业的投资机会，并对 天益科技有限公司</a:t>
-            </a:r>
-          </a:p>
-          <a:p>
-            <a:r>
-              <a:t>进行了重点评估。</a:t>
-            </a:r>
-          </a:p>
-          <a:p/>
-          <a:p/>
-          <a:p>
-            <a:r>
-              <a:t>华辰资本旗下的 HC Global Macro Fund 在最近的资产配置会议中</a:t>
-            </a:r>
-          </a:p>
-          <a:p>
-            <a:r>
-              <a:t>讨论了 医疗科技 行业的投资机会，并对 雨林木风计算机网络有限公司</a:t>
-            </a:r>
-          </a:p>
-          <a:p>
-            <a:r>
-              <a:t>进行了重点评估。</a:t>
             </a:r>
           </a:p>
           <a:p/>
@@ -3579,51 +3574,51 @@
           <a:p/>
           <a:p>
             <a:r>
-              <a:t>华辰资本旗下的 HC Alpha Growth Fund 在最近的资产配置会议中</a:t>
-            </a:r>
-          </a:p>
-          <a:p>
-            <a:r>
-              <a:t>讨论了 消费科技 行业的投资机会，并对 精芯信息有限公司</a:t>
-            </a:r>
-          </a:p>
-          <a:p>
-            <a:r>
-              <a:t>进行了重点评估。</a:t>
-            </a:r>
-          </a:p>
-          <a:p/>
-          <a:p/>
-          <a:p>
-            <a:r>
-              <a:t>从产业链角度看，新能源 行业主要由上游设备厂商、</a:t>
-            </a:r>
-          </a:p>
-          <a:p>
-            <a:r>
-              <a:t>中游平台企业以及下游应用厂商组成。</a:t>
-            </a:r>
-          </a:p>
-          <a:p>
-            <a:r>
-              <a:t>飞利信科技有限公司 主要位于产业链的 中游 环节。</a:t>
-            </a:r>
-          </a:p>
-          <a:p/>
-          <a:p/>
-          <a:p>
-            <a:r>
-              <a:t>华辰资本旗下的 HC Quant Arbitrage Fund 在最近的资产配置会议中</a:t>
-            </a:r>
-          </a:p>
-          <a:p>
-            <a:r>
-              <a:t>讨论了 机器人 行业的投资机会，并对 艾提科信科技有限公司</a:t>
-            </a:r>
-          </a:p>
-          <a:p>
-            <a:r>
-              <a:t>进行了重点评估。</a:t>
+              <a:t>风险管理部认为，消费科技 行业仍然面临若干</a:t>
+            </a:r>
+          </a:p>
+          <a:p>
+            <a:r>
+              <a:t>不确定性因素，包括技术迭代风险、政策变化、</a:t>
+            </a:r>
+          </a:p>
+          <a:p>
+            <a:r>
+              <a:t>以及市场竞争加剧等问题。</a:t>
+            </a:r>
+          </a:p>
+          <a:p/>
+          <a:p/>
+          <a:p>
+            <a:r>
+              <a:t>风险管理部认为，云计算 行业仍然面临若干</a:t>
+            </a:r>
+          </a:p>
+          <a:p>
+            <a:r>
+              <a:t>不确定性因素，包括技术迭代风险、政策变化、</a:t>
+            </a:r>
+          </a:p>
+          <a:p>
+            <a:r>
+              <a:t>以及市场竞争加剧等问题。</a:t>
+            </a:r>
+          </a:p>
+          <a:p/>
+          <a:p/>
+          <a:p>
+            <a:r>
+              <a:t>风险管理部认为，机器人 行业仍然面临若干</a:t>
+            </a:r>
+          </a:p>
+          <a:p>
+            <a:r>
+              <a:t>不确定性因素，包括技术迭代风险、政策变化、</a:t>
+            </a:r>
+          </a:p>
+          <a:p>
+            <a:r>
+              <a:t>以及市场竞争加剧等问题。</a:t>
             </a:r>
           </a:p>
           <a:p/>
@@ -3685,17 +3680,17 @@
           <a:p/>
           <a:p>
             <a:r>
-              <a:t>佳禾科技有限公司 是中国 半导体 行业的重要企业之一。</a:t>
-            </a:r>
-          </a:p>
-          <a:p>
-            <a:r>
-              <a:t>根据华辰资本 风险管理部 的研究，该公司成立于 2015 年，</a:t>
-            </a:r>
-          </a:p>
-          <a:p>
-            <a:r>
-              <a:t>目前员工规模约 3623 人。公司近年来持续加大研发投入，</a:t>
+              <a:t>华成育卓科技有限公司 是中国 医疗科技 行业的重要企业之一。</a:t>
+            </a:r>
+          </a:p>
+          <a:p>
+            <a:r>
+              <a:t>根据华辰资本 投资委员会 的研究，该公司成立于 2020 年，</a:t>
+            </a:r>
+          </a:p>
+          <a:p>
+            <a:r>
+              <a:t>目前员工规模约 650 人。公司近年来持续加大研发投入，</a:t>
             </a:r>
           </a:p>
           <a:p>
@@ -3707,34 +3702,34 @@
           <a:p/>
           <a:p>
             <a:r>
-              <a:t>风险管理部认为，半导体 行业仍然面临若干</a:t>
-            </a:r>
-          </a:p>
-          <a:p>
-            <a:r>
-              <a:t>不确定性因素，包括技术迭代风险、政策变化、</a:t>
-            </a:r>
-          </a:p>
-          <a:p>
-            <a:r>
-              <a:t>以及市场竞争加剧等问题。</a:t>
-            </a:r>
-          </a:p>
-          <a:p/>
-          <a:p/>
-          <a:p>
-            <a:r>
-              <a:t>风险管理部认为，消费科技 行业仍然面临若干</a:t>
-            </a:r>
-          </a:p>
-          <a:p>
-            <a:r>
-              <a:t>不确定性因素，包括技术迭代风险、政策变化、</a:t>
-            </a:r>
-          </a:p>
-          <a:p>
-            <a:r>
-              <a:t>以及市场竞争加剧等问题。</a:t>
+              <a:t>根据内部财务模型测算，华成育卓科技有限公司 在未来三年</a:t>
+            </a:r>
+          </a:p>
+          <a:p>
+            <a:r>
+              <a:t>收入复合增长率预计可达到 24% 左右。</a:t>
+            </a:r>
+          </a:p>
+          <a:p>
+            <a:r>
+              <a:t>该预测基于行业需求增长以及公司产能扩张计划。</a:t>
+            </a:r>
+          </a:p>
+          <a:p/>
+          <a:p/>
+          <a:p>
+            <a:r>
+              <a:t>根据内部财务模型测算，浦华众城网络有限公司 在未来三年</a:t>
+            </a:r>
+          </a:p>
+          <a:p>
+            <a:r>
+              <a:t>收入复合增长率预计可达到 20% 左右。</a:t>
+            </a:r>
+          </a:p>
+          <a:p>
+            <a:r>
+              <a:t>该预测基于行业需求增长以及公司产能扩张计划。</a:t>
             </a:r>
           </a:p>
           <a:p/>
@@ -3796,7 +3791,7 @@
           <a:p/>
           <a:p>
             <a:r>
-              <a:t>从产业链角度看，半导体 行业主要由上游设备厂商、</a:t>
+              <a:t>从产业链角度看，新能源 行业主要由上游设备厂商、</a:t>
             </a:r>
           </a:p>
           <a:p>
@@ -3806,41 +3801,41 @@
           </a:p>
           <a:p>
             <a:r>
-              <a:t>鸿睿思博信息有限公司 主要位于产业链的 中游 环节。</a:t>
-            </a:r>
-          </a:p>
-          <a:p/>
-          <a:p/>
-          <a:p>
-            <a:r>
-              <a:t>风险管理部认为，云计算 行业仍然面临若干</a:t>
-            </a:r>
-          </a:p>
-          <a:p>
-            <a:r>
-              <a:t>不确定性因素，包括技术迭代风险、政策变化、</a:t>
-            </a:r>
-          </a:p>
-          <a:p>
-            <a:r>
-              <a:t>以及市场竞争加剧等问题。</a:t>
-            </a:r>
-          </a:p>
-          <a:p/>
-          <a:p/>
-          <a:p>
-            <a:r>
-              <a:t>从产业链角度看，半导体 行业主要由上游设备厂商、</a:t>
-            </a:r>
-          </a:p>
-          <a:p>
-            <a:r>
-              <a:t>中游平台企业以及下游应用厂商组成。</a:t>
-            </a:r>
-          </a:p>
-          <a:p>
-            <a:r>
-              <a:t>华远软件信息有限公司 主要位于产业链的 上游 环节。</a:t>
+              <a:t>创汇传媒有限公司 主要位于产业链的 下游 环节。</a:t>
+            </a:r>
+          </a:p>
+          <a:p/>
+          <a:p/>
+          <a:p>
+            <a:r>
+              <a:t>华辰资本旗下的 HC Energy Transition Fund 在最近的资产配置会议中</a:t>
+            </a:r>
+          </a:p>
+          <a:p>
+            <a:r>
+              <a:t>讨论了 半导体 行业的投资机会，并对 中建创业科技有限公司</a:t>
+            </a:r>
+          </a:p>
+          <a:p>
+            <a:r>
+              <a:t>进行了重点评估。</a:t>
+            </a:r>
+          </a:p>
+          <a:p/>
+          <a:p/>
+          <a:p>
+            <a:r>
+              <a:t>华辰资本旗下的 HC Global Macro Fund 在最近的资产配置会议中</a:t>
+            </a:r>
+          </a:p>
+          <a:p>
+            <a:r>
+              <a:t>讨论了 新能源 行业的投资机会，并对 创汇传媒有限公司</a:t>
+            </a:r>
+          </a:p>
+          <a:p>
+            <a:r>
+              <a:t>进行了重点评估。</a:t>
             </a:r>
           </a:p>
           <a:p/>
@@ -3902,7 +3897,41 @@
           <a:p/>
           <a:p>
             <a:r>
-              <a:t>风险管理部认为，医疗科技 行业仍然面临若干</a:t>
+              <a:t>根据内部财务模型测算，浦华众城网络有限公司 在未来三年</a:t>
+            </a:r>
+          </a:p>
+          <a:p>
+            <a:r>
+              <a:t>收入复合增长率预计可达到 33% 左右。</a:t>
+            </a:r>
+          </a:p>
+          <a:p>
+            <a:r>
+              <a:t>该预测基于行业需求增长以及公司产能扩张计划。</a:t>
+            </a:r>
+          </a:p>
+          <a:p/>
+          <a:p/>
+          <a:p>
+            <a:r>
+              <a:t>从产业链角度看，新能源 行业主要由上游设备厂商、</a:t>
+            </a:r>
+          </a:p>
+          <a:p>
+            <a:r>
+              <a:t>中游平台企业以及下游应用厂商组成。</a:t>
+            </a:r>
+          </a:p>
+          <a:p>
+            <a:r>
+              <a:t>浦华众城网络有限公司 主要位于产业链的 下游 环节。</a:t>
+            </a:r>
+          </a:p>
+          <a:p/>
+          <a:p/>
+          <a:p>
+            <a:r>
+              <a:t>风险管理部认为，消费科技 行业仍然面临若干</a:t>
             </a:r>
           </a:p>
           <a:p>
@@ -3913,45 +3942,6 @@
           <a:p>
             <a:r>
               <a:t>以及市场竞争加剧等问题。</a:t>
-            </a:r>
-          </a:p>
-          <a:p/>
-          <a:p/>
-          <a:p>
-            <a:r>
-              <a:t>从产业链角度看，医疗科技 行业主要由上游设备厂商、</a:t>
-            </a:r>
-          </a:p>
-          <a:p>
-            <a:r>
-              <a:t>中游平台企业以及下游应用厂商组成。</a:t>
-            </a:r>
-          </a:p>
-          <a:p>
-            <a:r>
-              <a:t>雨林木风计算机网络有限公司 主要位于产业链的 中游 环节。</a:t>
-            </a:r>
-          </a:p>
-          <a:p/>
-          <a:p/>
-          <a:p>
-            <a:r>
-              <a:t>和泰科技有限公司 是中国 人工智能 行业的重要企业之一。</a:t>
-            </a:r>
-          </a:p>
-          <a:p>
-            <a:r>
-              <a:t>根据华辰资本 资产配置委员会 的研究，该公司成立于 2008 年，</a:t>
-            </a:r>
-          </a:p>
-          <a:p>
-            <a:r>
-              <a:t>目前员工规模约 6443 人。公司近年来持续加大研发投入，</a:t>
-            </a:r>
-          </a:p>
-          <a:p>
-            <a:r>
-              <a:t>在核心技术方面形成了较强的竞争壁垒。</a:t>
             </a:r>
           </a:p>
           <a:p/>
@@ -4013,12 +4003,12 @@
           <a:p/>
           <a:p>
             <a:r>
-              <a:t>根据内部财务模型测算，凌云网络有限公司 在未来三年</a:t>
-            </a:r>
-          </a:p>
-          <a:p>
-            <a:r>
-              <a:t>收入复合增长率预计可达到 35% 左右。</a:t>
+              <a:t>根据内部财务模型测算，巨奥传媒有限公司 在未来三年</a:t>
+            </a:r>
+          </a:p>
+          <a:p>
+            <a:r>
+              <a:t>收入复合增长率预计可达到 15% 左右。</a:t>
             </a:r>
           </a:p>
           <a:p>
@@ -4030,34 +4020,39 @@
           <a:p/>
           <a:p>
             <a:r>
-              <a:t>华辰资本旗下的 HC Quant Arbitrage Fund 在最近的资产配置会议中</a:t>
-            </a:r>
-          </a:p>
-          <a:p>
-            <a:r>
-              <a:t>讨论了 云计算 行业的投资机会，并对 国讯网络有限公司</a:t>
-            </a:r>
-          </a:p>
-          <a:p>
-            <a:r>
-              <a:t>进行了重点评估。</a:t>
-            </a:r>
-          </a:p>
-          <a:p/>
-          <a:p/>
-          <a:p>
-            <a:r>
-              <a:t>从产业链角度看，新能源 行业主要由上游设备厂商、</a:t>
-            </a:r>
-          </a:p>
-          <a:p>
-            <a:r>
-              <a:t>中游平台企业以及下游应用厂商组成。</a:t>
-            </a:r>
-          </a:p>
-          <a:p>
-            <a:r>
-              <a:t>昊嘉网络有限公司 主要位于产业链的 上游 环节。</a:t>
+              <a:t>风险管理部认为，医疗科技 行业仍然面临若干</a:t>
+            </a:r>
+          </a:p>
+          <a:p>
+            <a:r>
+              <a:t>不确定性因素，包括技术迭代风险、政策变化、</a:t>
+            </a:r>
+          </a:p>
+          <a:p>
+            <a:r>
+              <a:t>以及市场竞争加剧等问题。</a:t>
+            </a:r>
+          </a:p>
+          <a:p/>
+          <a:p/>
+          <a:p>
+            <a:r>
+              <a:t>艾提科信科技有限公司 是中国 云计算 行业的重要企业之一。</a:t>
+            </a:r>
+          </a:p>
+          <a:p>
+            <a:r>
+              <a:t>根据华辰资本 资产配置委员会 的研究，该公司成立于 2006 年，</a:t>
+            </a:r>
+          </a:p>
+          <a:p>
+            <a:r>
+              <a:t>目前员工规模约 3804 人。公司近年来持续加大研发投入，</a:t>
+            </a:r>
+          </a:p>
+          <a:p>
+            <a:r>
+              <a:t>在核心技术方面形成了较强的竞争壁垒。</a:t>
             </a:r>
           </a:p>
           <a:p/>
@@ -4119,7 +4114,7 @@
           <a:p/>
           <a:p>
             <a:r>
-              <a:t>从产业链角度看，半导体 行业主要由上游设备厂商、</a:t>
+              <a:t>从产业链角度看，消费科技 行业主要由上游设备厂商、</a:t>
             </a:r>
           </a:p>
           <a:p>
@@ -4129,24 +4124,24 @@
           </a:p>
           <a:p>
             <a:r>
-              <a:t>万迅电脑网络有限公司 主要位于产业链的 中游 环节。</a:t>
-            </a:r>
-          </a:p>
-          <a:p/>
-          <a:p/>
-          <a:p>
-            <a:r>
-              <a:t>精芯信息有限公司 是中国 消费科技 行业的重要企业之一。</a:t>
-            </a:r>
-          </a:p>
-          <a:p>
-            <a:r>
-              <a:t>根据华辰资本 风险管理部 的研究，该公司成立于 2010 年，</a:t>
-            </a:r>
-          </a:p>
-          <a:p>
-            <a:r>
-              <a:t>目前员工规模约 6207 人。公司近年来持续加大研发投入，</a:t>
+              <a:t>联软科技有限公司 主要位于产业链的 中游 环节。</a:t>
+            </a:r>
+          </a:p>
+          <a:p/>
+          <a:p/>
+          <a:p>
+            <a:r>
+              <a:t>飞利信科技有限公司 是中国 人工智能 行业的重要企业之一。</a:t>
+            </a:r>
+          </a:p>
+          <a:p>
+            <a:r>
+              <a:t>根据华辰资本 资产配置委员会 的研究，该公司成立于 2018 年，</a:t>
+            </a:r>
+          </a:p>
+          <a:p>
+            <a:r>
+              <a:t>目前员工规模约 1801 人。公司近年来持续加大研发投入，</a:t>
             </a:r>
           </a:p>
           <a:p>
@@ -4158,17 +4153,22 @@
           <a:p/>
           <a:p>
             <a:r>
-              <a:t>根据内部财务模型测算，和泰科技有限公司 在未来三年</a:t>
-            </a:r>
-          </a:p>
-          <a:p>
-            <a:r>
-              <a:t>收入复合增长率预计可达到 31% 左右。</a:t>
-            </a:r>
-          </a:p>
-          <a:p>
-            <a:r>
-              <a:t>该预测基于行业需求增长以及公司产能扩张计划。</a:t>
+              <a:t>佳禾传媒有限公司 是中国 云计算 行业的重要企业之一。</a:t>
+            </a:r>
+          </a:p>
+          <a:p>
+            <a:r>
+              <a:t>根据华辰资本 风险管理部 的研究，该公司成立于 2016 年，</a:t>
+            </a:r>
+          </a:p>
+          <a:p>
+            <a:r>
+              <a:t>目前员工规模约 3802 人。公司近年来持续加大研发投入，</a:t>
+            </a:r>
+          </a:p>
+          <a:p>
+            <a:r>
+              <a:t>在核心技术方面形成了较强的竞争壁垒。</a:t>
             </a:r>
           </a:p>
           <a:p/>
@@ -4230,46 +4230,46 @@
           <a:p/>
           <a:p>
             <a:r>
-              <a:t>风险管理部认为，半导体 行业仍然面临若干</a:t>
-            </a:r>
-          </a:p>
-          <a:p>
-            <a:r>
-              <a:t>不确定性因素，包括技术迭代风险、政策变化、</a:t>
-            </a:r>
-          </a:p>
-          <a:p>
-            <a:r>
-              <a:t>以及市场竞争加剧等问题。</a:t>
-            </a:r>
-          </a:p>
-          <a:p/>
-          <a:p/>
-          <a:p>
-            <a:r>
-              <a:t>风险管理部认为，医疗科技 行业仍然面临若干</a:t>
-            </a:r>
-          </a:p>
-          <a:p>
-            <a:r>
-              <a:t>不确定性因素，包括技术迭代风险、政策变化、</a:t>
-            </a:r>
-          </a:p>
-          <a:p>
-            <a:r>
-              <a:t>以及市场竞争加剧等问题。</a:t>
-            </a:r>
-          </a:p>
-          <a:p/>
-          <a:p/>
-          <a:p>
-            <a:r>
-              <a:t>华辰资本旗下的 HC Alpha Growth Fund 在最近的资产配置会议中</a:t>
-            </a:r>
-          </a:p>
-          <a:p>
-            <a:r>
-              <a:t>讨论了 云计算 行业的投资机会，并对 易动力科技有限公司</a:t>
+              <a:t>华辰资本旗下的 HC Energy Transition Fund 在最近的资产配置会议中</a:t>
+            </a:r>
+          </a:p>
+          <a:p>
+            <a:r>
+              <a:t>讨论了 医疗科技 行业的投资机会，并对 华成育卓科技有限公司</a:t>
+            </a:r>
+          </a:p>
+          <a:p>
+            <a:r>
+              <a:t>进行了重点评估。</a:t>
+            </a:r>
+          </a:p>
+          <a:p/>
+          <a:p/>
+          <a:p>
+            <a:r>
+              <a:t>根据内部财务模型测算，毕博诚信息有限公司 在未来三年</a:t>
+            </a:r>
+          </a:p>
+          <a:p>
+            <a:r>
+              <a:t>收入复合增长率预计可达到 11% 左右。</a:t>
+            </a:r>
+          </a:p>
+          <a:p>
+            <a:r>
+              <a:t>该预测基于行业需求增长以及公司产能扩张计划。</a:t>
+            </a:r>
+          </a:p>
+          <a:p/>
+          <a:p/>
+          <a:p>
+            <a:r>
+              <a:t>华辰资本旗下的 HC Quant Arbitrage Fund 在最近的资产配置会议中</a:t>
+            </a:r>
+          </a:p>
+          <a:p>
+            <a:r>
+              <a:t>讨论了 云计算 行业的投资机会，并对 创联世纪信息有限公司</a:t>
             </a:r>
           </a:p>
           <a:p>
@@ -4336,51 +4336,51 @@
           <a:p/>
           <a:p>
             <a:r>
-              <a:t>华辰资本旗下的 HC AI Innovation Fund 在最近的资产配置会议中</a:t>
-            </a:r>
-          </a:p>
-          <a:p>
-            <a:r>
-              <a:t>讨论了 半导体 行业的投资机会，并对 天益科技有限公司</a:t>
+              <a:t>根据内部财务模型测算，创联世纪信息有限公司 在未来三年</a:t>
+            </a:r>
+          </a:p>
+          <a:p>
+            <a:r>
+              <a:t>收入复合增长率预计可达到 19% 左右。</a:t>
+            </a:r>
+          </a:p>
+          <a:p>
+            <a:r>
+              <a:t>该预测基于行业需求增长以及公司产能扩张计划。</a:t>
+            </a:r>
+          </a:p>
+          <a:p/>
+          <a:p/>
+          <a:p>
+            <a:r>
+              <a:t>根据内部财务模型测算，精芯信息有限公司 在未来三年</a:t>
+            </a:r>
+          </a:p>
+          <a:p>
+            <a:r>
+              <a:t>收入复合增长率预计可达到 21% 左右。</a:t>
+            </a:r>
+          </a:p>
+          <a:p>
+            <a:r>
+              <a:t>该预测基于行业需求增长以及公司产能扩张计划。</a:t>
+            </a:r>
+          </a:p>
+          <a:p/>
+          <a:p/>
+          <a:p>
+            <a:r>
+              <a:t>华辰资本旗下的 HC Alpha Growth Fund 在最近的资产配置会议中</a:t>
+            </a:r>
+          </a:p>
+          <a:p>
+            <a:r>
+              <a:t>讨论了 机器人 行业的投资机会，并对 毕博诚信息有限公司</a:t>
             </a:r>
           </a:p>
           <a:p>
             <a:r>
               <a:t>进行了重点评估。</a:t>
-            </a:r>
-          </a:p>
-          <a:p/>
-          <a:p/>
-          <a:p>
-            <a:r>
-              <a:t>根据内部财务模型测算，济南亿次元网络有限公司 在未来三年</a:t>
-            </a:r>
-          </a:p>
-          <a:p>
-            <a:r>
-              <a:t>收入复合增长率预计可达到 18% 左右。</a:t>
-            </a:r>
-          </a:p>
-          <a:p>
-            <a:r>
-              <a:t>该预测基于行业需求增长以及公司产能扩张计划。</a:t>
-            </a:r>
-          </a:p>
-          <a:p/>
-          <a:p/>
-          <a:p>
-            <a:r>
-              <a:t>风险管理部认为，半导体 行业仍然面临若干</a:t>
-            </a:r>
-          </a:p>
-          <a:p>
-            <a:r>
-              <a:t>不确定性因素，包括技术迭代风险、政策变化、</a:t>
-            </a:r>
-          </a:p>
-          <a:p>
-            <a:r>
-              <a:t>以及市场竞争加剧等问题。</a:t>
             </a:r>
           </a:p>
           <a:p/>
@@ -4442,51 +4442,51 @@
           <a:p/>
           <a:p>
             <a:r>
-              <a:t>华辰资本旗下的 HC AI Innovation Fund 在最近的资产配置会议中</a:t>
-            </a:r>
-          </a:p>
-          <a:p>
-            <a:r>
-              <a:t>讨论了 新能源 行业的投资机会，并对 九方网络有限公司</a:t>
-            </a:r>
-          </a:p>
-          <a:p>
-            <a:r>
-              <a:t>进行了重点评估。</a:t>
-            </a:r>
-          </a:p>
-          <a:p/>
-          <a:p/>
-          <a:p>
-            <a:r>
-              <a:t>华辰资本旗下的 HC Global Macro Fund 在最近的资产配置会议中</a:t>
-            </a:r>
-          </a:p>
-          <a:p>
-            <a:r>
-              <a:t>讨论了 新能源 行业的投资机会，并对 鸿睿思博网络有限公司</a:t>
-            </a:r>
-          </a:p>
-          <a:p>
-            <a:r>
-              <a:t>进行了重点评估。</a:t>
-            </a:r>
-          </a:p>
-          <a:p/>
-          <a:p/>
-          <a:p>
-            <a:r>
-              <a:t>风险管理部认为，人工智能 行业仍然面临若干</a:t>
-            </a:r>
-          </a:p>
-          <a:p>
-            <a:r>
-              <a:t>不确定性因素，包括技术迭代风险、政策变化、</a:t>
-            </a:r>
-          </a:p>
-          <a:p>
-            <a:r>
-              <a:t>以及市场竞争加剧等问题。</a:t>
+              <a:t>从产业链角度看，人工智能 行业主要由上游设备厂商、</a:t>
+            </a:r>
+          </a:p>
+          <a:p>
+            <a:r>
+              <a:t>中游平台企业以及下游应用厂商组成。</a:t>
+            </a:r>
+          </a:p>
+          <a:p>
+            <a:r>
+              <a:t>明腾传媒有限公司 主要位于产业链的 上游 环节。</a:t>
+            </a:r>
+          </a:p>
+          <a:p/>
+          <a:p/>
+          <a:p>
+            <a:r>
+              <a:t>从产业链角度看，机器人 行业主要由上游设备厂商、</a:t>
+            </a:r>
+          </a:p>
+          <a:p>
+            <a:r>
+              <a:t>中游平台企业以及下游应用厂商组成。</a:t>
+            </a:r>
+          </a:p>
+          <a:p>
+            <a:r>
+              <a:t>通际名联网络有限公司 主要位于产业链的 上游 环节。</a:t>
+            </a:r>
+          </a:p>
+          <a:p/>
+          <a:p/>
+          <a:p>
+            <a:r>
+              <a:t>从产业链角度看，人工智能 行业主要由上游设备厂商、</a:t>
+            </a:r>
+          </a:p>
+          <a:p>
+            <a:r>
+              <a:t>中游平台企业以及下游应用厂商组成。</a:t>
+            </a:r>
+          </a:p>
+          <a:p>
+            <a:r>
+              <a:t>飞利信科技有限公司 主要位于产业链的 中游 环节。</a:t>
             </a:r>
           </a:p>
           <a:p/>
@@ -4548,51 +4548,56 @@
           <a:p/>
           <a:p>
             <a:r>
-              <a:t>风险管理部认为，半导体 行业仍然面临若干</a:t>
-            </a:r>
-          </a:p>
-          <a:p>
-            <a:r>
-              <a:t>不确定性因素，包括技术迭代风险、政策变化、</a:t>
-            </a:r>
-          </a:p>
-          <a:p>
-            <a:r>
-              <a:t>以及市场竞争加剧等问题。</a:t>
-            </a:r>
-          </a:p>
-          <a:p/>
-          <a:p/>
-          <a:p>
-            <a:r>
-              <a:t>风险管理部认为，机器人 行业仍然面临若干</a:t>
-            </a:r>
-          </a:p>
-          <a:p>
-            <a:r>
-              <a:t>不确定性因素，包括技术迭代风险、政策变化、</a:t>
-            </a:r>
-          </a:p>
-          <a:p>
-            <a:r>
-              <a:t>以及市场竞争加剧等问题。</a:t>
-            </a:r>
-          </a:p>
-          <a:p/>
-          <a:p/>
-          <a:p>
-            <a:r>
-              <a:t>风险管理部认为，新能源 行业仍然面临若干</a:t>
-            </a:r>
-          </a:p>
-          <a:p>
-            <a:r>
-              <a:t>不确定性因素，包括技术迭代风险、政策变化、</a:t>
-            </a:r>
-          </a:p>
-          <a:p>
-            <a:r>
-              <a:t>以及市场竞争加剧等问题。</a:t>
+              <a:t>从产业链角度看，半导体 行业主要由上游设备厂商、</a:t>
+            </a:r>
+          </a:p>
+          <a:p>
+            <a:r>
+              <a:t>中游平台企业以及下游应用厂商组成。</a:t>
+            </a:r>
+          </a:p>
+          <a:p>
+            <a:r>
+              <a:t>雨林木风计算机科技有限公司 主要位于产业链的 上游 环节。</a:t>
+            </a:r>
+          </a:p>
+          <a:p/>
+          <a:p/>
+          <a:p>
+            <a:r>
+              <a:t>中建创业科技有限公司 是中国 半导体 行业的重要企业之一。</a:t>
+            </a:r>
+          </a:p>
+          <a:p>
+            <a:r>
+              <a:t>根据华辰资本 投资策略部 的研究，该公司成立于 2006 年，</a:t>
+            </a:r>
+          </a:p>
+          <a:p>
+            <a:r>
+              <a:t>目前员工规模约 6832 人。公司近年来持续加大研发投入，</a:t>
+            </a:r>
+          </a:p>
+          <a:p>
+            <a:r>
+              <a:t>在核心技术方面形成了较强的竞争壁垒。</a:t>
+            </a:r>
+          </a:p>
+          <a:p/>
+          <a:p/>
+          <a:p>
+            <a:r>
+              <a:t>华辰资本旗下的 HC AI Innovation Fund 在最近的资产配置会议中</a:t>
+            </a:r>
+          </a:p>
+          <a:p>
+            <a:r>
+              <a:t>讨论了 机器人 行业的投资机会，并对 毕博诚信息有限公司</a:t>
+            </a:r>
+          </a:p>
+          <a:p>
+            <a:r>
+              <a:t>进行了重点评估。</a:t>
             </a:r>
           </a:p>
           <a:p/>
@@ -4654,51 +4659,56 @@
           <a:p/>
           <a:p>
             <a:r>
-              <a:t>从产业链角度看，新能源 行业主要由上游设备厂商、</a:t>
-            </a:r>
-          </a:p>
-          <a:p>
-            <a:r>
-              <a:t>中游平台企业以及下游应用厂商组成。</a:t>
-            </a:r>
-          </a:p>
-          <a:p>
-            <a:r>
-              <a:t>东方峻景传媒有限公司 主要位于产业链的 下游 环节。</a:t>
-            </a:r>
-          </a:p>
-          <a:p/>
-          <a:p/>
-          <a:p>
-            <a:r>
-              <a:t>从产业链角度看，云计算 行业主要由上游设备厂商、</a:t>
-            </a:r>
-          </a:p>
-          <a:p>
-            <a:r>
-              <a:t>中游平台企业以及下游应用厂商组成。</a:t>
-            </a:r>
-          </a:p>
-          <a:p>
-            <a:r>
-              <a:t>易动力科技有限公司 主要位于产业链的 中游 环节。</a:t>
-            </a:r>
-          </a:p>
-          <a:p/>
-          <a:p/>
-          <a:p>
-            <a:r>
-              <a:t>从产业链角度看，新能源 行业主要由上游设备厂商、</a:t>
-            </a:r>
-          </a:p>
-          <a:p>
-            <a:r>
-              <a:t>中游平台企业以及下游应用厂商组成。</a:t>
-            </a:r>
-          </a:p>
-          <a:p>
-            <a:r>
-              <a:t>昊嘉网络有限公司 主要位于产业链的 下游 环节。</a:t>
+              <a:t>华辰资本旗下的 HC Global Macro Fund 在最近的资产配置会议中</a:t>
+            </a:r>
+          </a:p>
+          <a:p>
+            <a:r>
+              <a:t>讨论了 半导体 行业的投资机会，并对 联软网络有限公司</a:t>
+            </a:r>
+          </a:p>
+          <a:p>
+            <a:r>
+              <a:t>进行了重点评估。</a:t>
+            </a:r>
+          </a:p>
+          <a:p/>
+          <a:p/>
+          <a:p>
+            <a:r>
+              <a:t>风险管理部认为，云计算 行业仍然面临若干</a:t>
+            </a:r>
+          </a:p>
+          <a:p>
+            <a:r>
+              <a:t>不确定性因素，包括技术迭代风险、政策变化、</a:t>
+            </a:r>
+          </a:p>
+          <a:p>
+            <a:r>
+              <a:t>以及市场竞争加剧等问题。</a:t>
+            </a:r>
+          </a:p>
+          <a:p/>
+          <a:p/>
+          <a:p>
+            <a:r>
+              <a:t>图龙信息传媒有限公司 是中国 机器人 行业的重要企业之一。</a:t>
+            </a:r>
+          </a:p>
+          <a:p>
+            <a:r>
+              <a:t>根据华辰资本 风险管理部 的研究，该公司成立于 2007 年，</a:t>
+            </a:r>
+          </a:p>
+          <a:p>
+            <a:r>
+              <a:t>目前员工规模约 2000 人。公司近年来持续加大研发投入，</a:t>
+            </a:r>
+          </a:p>
+          <a:p>
+            <a:r>
+              <a:t>在核心技术方面形成了较强的竞争壁垒。</a:t>
             </a:r>
           </a:p>
           <a:p/>
